--- a/08-Kubernetes/session6/08-Ingress-AWS-LBC.pptx
+++ b/08-Kubernetes/session6/08-Ingress-AWS-LBC.pptx
@@ -5236,7 +5236,7 @@
                 <a:ea typeface="Arial" pitchFamily="34" charset="-122"/>
                 <a:cs typeface="Arial" pitchFamily="34" charset="-120"/>
               </a:rPr>
-              <a:t>References backend services</a:t>
+              <a:t>References the services</a:t>
             </a:r>
             <a:endParaRPr lang="en-US" sz="1300" dirty="0"/>
           </a:p>
